--- a/classes/parte-2-criptografia-aplicada/046-historia-y-fundamentos-de-la-criptografia/clase-046-presentacion.pptx
+++ b/classes/parte-2-criptografia-aplicada/046-historia-y-fundamentos-de-la-criptografia/clase-046-presentacion.pptx
@@ -17,6 +17,9 @@
     <p:sldId id="265" r:id="rId16"/>
     <p:sldId id="266" r:id="rId17"/>
     <p:sldId id="267" r:id="rId18"/>
+    <p:sldId id="268" r:id="rId19"/>
+    <p:sldId id="269" r:id="rId20"/>
+    <p:sldId id="270" r:id="rId21"/>
   </p:sldIdLst>
   <p:sldSz cx="9144000" cy="6858000" type="screen4x3"/>
   <p:notesSz cx="6858000" cy="9144000"/>
@@ -3198,7 +3201,7 @@
                   <a:srgbClr val="0B3D2E"/>
                 </a:solidFill>
               </a:rPr>
-              <a:t>⚠️ Errores comunes</a:t>
+              <a:t>✍️ Ejercicios</a:t>
             </a:r>
           </a:p>
         </p:txBody>
@@ -3236,67 +3239,82 @@
                   <a:srgbClr val="22282E"/>
                 </a:solidFill>
               </a:rPr>
-              <a:t>•  "Mi cifrado es seguro porque nadie conoce el algoritmo" — Viola Kerckhoffs; asume que el algoritmo se filtrará y basa la seguridad en la clave</a:t>
-            </a:r>
-          </a:p>
-          <a:p>
-            <a:pPr>
-              <a:spcAft>
-                <a:spcPts val="600"/>
-              </a:spcAft>
-            </a:pPr>
-            <a:r>
-              <a:rPr sz="1500">
-                <a:solidFill>
-                  <a:srgbClr val="22282E"/>
-                </a:solidFill>
-              </a:rPr>
-              <a:t>•  Análisis de frecuencias no funciona — Texto demasiado corto; necesita muestra suficiente</a:t>
-            </a:r>
-          </a:p>
-          <a:p>
-            <a:pPr>
-              <a:spcAft>
-                <a:spcPts val="600"/>
-              </a:spcAft>
-            </a:pPr>
-            <a:r>
-              <a:rPr sz="1500">
-                <a:solidFill>
-                  <a:srgbClr val="22282E"/>
-                </a:solidFill>
-              </a:rPr>
-              <a:t>•  Confundir codificación (Base64) con cifrado — Base64 no oculta nada; es reversible sin clave</a:t>
-            </a:r>
-          </a:p>
-          <a:p>
-            <a:pPr>
-              <a:spcAft>
-                <a:spcPts val="600"/>
-              </a:spcAft>
-            </a:pPr>
-            <a:r>
-              <a:rPr sz="1500">
-                <a:solidFill>
-                  <a:srgbClr val="22282E"/>
-                </a:solidFill>
-              </a:rPr>
-              <a:t>•  "Doble ROT13 = más seguro" — ROT13 es su propia inversa; doble no cifra nada</a:t>
-            </a:r>
-          </a:p>
-          <a:p>
-            <a:pPr>
-              <a:spcAft>
-                <a:spcPts val="600"/>
-              </a:spcAft>
-            </a:pPr>
-            <a:r>
-              <a:rPr sz="1500">
-                <a:solidFill>
-                  <a:srgbClr val="22282E"/>
-                </a:solidFill>
-              </a:rPr>
-              <a:t>•  Reusar clave de Vigenère en muchos mensajes — Facilita Kasiski y correlación entre textos</a:t>
+              <a:t>•  Descifra a mano WKLV LV D WHVW sabiendo que es César.</a:t>
+            </a:r>
+          </a:p>
+          <a:p>
+            <a:pPr>
+              <a:spcAft>
+                <a:spcPts val="600"/>
+              </a:spcAft>
+            </a:pPr>
+            <a:r>
+              <a:rPr sz="1500">
+                <a:solidFill>
+                  <a:srgbClr val="22282E"/>
+                </a:solidFill>
+              </a:rPr>
+              <a:t>•  Escribe una función que rompa Vigenère dada la longitud de clave.</a:t>
+            </a:r>
+          </a:p>
+          <a:p>
+            <a:pPr>
+              <a:spcAft>
+                <a:spcPts val="600"/>
+              </a:spcAft>
+            </a:pPr>
+            <a:r>
+              <a:rPr sz="1500">
+                <a:solidFill>
+                  <a:srgbClr val="22282E"/>
+                </a:solidFill>
+              </a:rPr>
+              <a:t>•  Redacta un modelo de amenaza para una app de chat: define atacante, capacidades y activos.</a:t>
+            </a:r>
+          </a:p>
+          <a:p>
+            <a:pPr>
+              <a:spcAft>
+                <a:spcPts val="600"/>
+              </a:spcAft>
+            </a:pPr>
+            <a:r>
+              <a:rPr sz="1500">
+                <a:solidFill>
+                  <a:srgbClr val="22282E"/>
+                </a:solidFill>
+              </a:rPr>
+              <a:t>•  Explica con un ejemplo por qué la "seguridad por oscuridad" falló en un caso real (p. ej. cifrados propietarios rotos).</a:t>
+            </a:r>
+          </a:p>
+          <a:p>
+            <a:pPr>
+              <a:spcAft>
+                <a:spcPts val="600"/>
+              </a:spcAft>
+            </a:pPr>
+            <a:r>
+              <a:rPr sz="1500">
+                <a:solidFill>
+                  <a:srgbClr val="22282E"/>
+                </a:solidFill>
+              </a:rPr>
+              <a:t>•  Compara el espacio de claves de César, DES (56 bits) y AES-128; expresa cuántas veces mayor es cada uno.</a:t>
+            </a:r>
+          </a:p>
+          <a:p>
+            <a:pPr>
+              <a:spcAft>
+                <a:spcPts val="600"/>
+              </a:spcAft>
+            </a:pPr>
+            <a:r>
+              <a:rPr sz="1500">
+                <a:solidFill>
+                  <a:srgbClr val="22282E"/>
+                </a:solidFill>
+              </a:rPr>
+              <a:t>•  Diseña un cifrado de transposición columnar y descíbelo con criptoanálisis.</a:t>
             </a:r>
           </a:p>
         </p:txBody>
@@ -3347,7 +3365,7 @@
                   <a:srgbClr val="0B3D2E"/>
                 </a:solidFill>
               </a:rPr>
-              <a:t>❓ Preguntas frecuentes</a:t>
+              <a:t>📝 Reto verificable</a:t>
             </a:r>
           </a:p>
         </p:txBody>
@@ -3385,82 +3403,7 @@
                   <a:srgbClr val="22282E"/>
                 </a:solidFill>
               </a:rPr>
-              <a:t>•  ❓ ¿Sigue siendo útil estudiar cifrados clásicos?</a:t>
-            </a:r>
-          </a:p>
-          <a:p>
-            <a:pPr>
-              <a:spcAft>
-                <a:spcPts val="600"/>
-              </a:spcAft>
-            </a:pPr>
-            <a:r>
-              <a:rPr sz="1500">
-                <a:solidFill>
-                  <a:srgbClr val="22282E"/>
-                </a:solidFill>
-              </a:rPr>
-              <a:t>•  Sí: enseñan intuición sobre patrones, frecuencias y por qué las primitivas modernas están diseñadas para eliminar esas estructuras.</a:t>
-            </a:r>
-          </a:p>
-          <a:p>
-            <a:pPr>
-              <a:spcAft>
-                <a:spcPts val="600"/>
-              </a:spcAft>
-            </a:pPr>
-            <a:r>
-              <a:rPr sz="1500">
-                <a:solidFill>
-                  <a:srgbClr val="22282E"/>
-                </a:solidFill>
-              </a:rPr>
-              <a:t>•  ❓ ¿Qué significa que un cifrado sea "seguro"?</a:t>
-            </a:r>
-          </a:p>
-          <a:p>
-            <a:pPr>
-              <a:spcAft>
-                <a:spcPts val="600"/>
-              </a:spcAft>
-            </a:pPr>
-            <a:r>
-              <a:rPr sz="1500">
-                <a:solidFill>
-                  <a:srgbClr val="22282E"/>
-                </a:solidFill>
-              </a:rPr>
-              <a:t>•  Que ningún atacante dentro del modelo de amenaza definido puede romperlo con recursos razonables. La seguridad siempre es relativa a un adversario concreto.</a:t>
-            </a:r>
-          </a:p>
-          <a:p>
-            <a:pPr>
-              <a:spcAft>
-                <a:spcPts val="600"/>
-              </a:spcAft>
-            </a:pPr>
-            <a:r>
-              <a:rPr sz="1500">
-                <a:solidFill>
-                  <a:srgbClr val="22282E"/>
-                </a:solidFill>
-              </a:rPr>
-              <a:t>•  ❓ ¿Por qué "no hagas tu propia cripto"?</a:t>
-            </a:r>
-          </a:p>
-          <a:p>
-            <a:pPr>
-              <a:spcAft>
-                <a:spcPts val="600"/>
-              </a:spcAft>
-            </a:pPr>
-            <a:r>
-              <a:rPr sz="1500">
-                <a:solidFill>
-                  <a:srgbClr val="22282E"/>
-                </a:solidFill>
-              </a:rPr>
-              <a:t>•  Porque los errores sutiles (nonces, padding, timing) rompen esquemas que parecen correctos; usa librerías auditadas.</a:t>
+              <a:t>•  Implementa un rompedor automático de cifrado por sustitución monoalfabética usando análisis de frecuencias y bigramas. Criterio de aceptación: dado un texto cifrado en español de al menos 500…</a:t>
             </a:r>
           </a:p>
         </p:txBody>
@@ -3511,7 +3454,7 @@
                   <a:srgbClr val="0B3D2E"/>
                 </a:solidFill>
               </a:rPr>
-              <a:t>🔗 Referencias</a:t>
+              <a:t>⚠️ Errores comunes</a:t>
             </a:r>
           </a:p>
         </p:txBody>
@@ -3549,6 +3492,319 @@
                   <a:srgbClr val="22282E"/>
                 </a:solidFill>
               </a:rPr>
+              <a:t>•  "Mi cifrado es seguro porque nadie conoce el algoritmo" — Viola Kerckhoffs; asume que el algoritmo se filtrará y basa la seguridad en la clave</a:t>
+            </a:r>
+          </a:p>
+          <a:p>
+            <a:pPr>
+              <a:spcAft>
+                <a:spcPts val="600"/>
+              </a:spcAft>
+            </a:pPr>
+            <a:r>
+              <a:rPr sz="1500">
+                <a:solidFill>
+                  <a:srgbClr val="22282E"/>
+                </a:solidFill>
+              </a:rPr>
+              <a:t>•  Análisis de frecuencias no funciona — Texto demasiado corto; necesita muestra suficiente</a:t>
+            </a:r>
+          </a:p>
+          <a:p>
+            <a:pPr>
+              <a:spcAft>
+                <a:spcPts val="600"/>
+              </a:spcAft>
+            </a:pPr>
+            <a:r>
+              <a:rPr sz="1500">
+                <a:solidFill>
+                  <a:srgbClr val="22282E"/>
+                </a:solidFill>
+              </a:rPr>
+              <a:t>•  Confundir codificación (Base64) con cifrado — Base64 no oculta nada; es reversible sin clave</a:t>
+            </a:r>
+          </a:p>
+          <a:p>
+            <a:pPr>
+              <a:spcAft>
+                <a:spcPts val="600"/>
+              </a:spcAft>
+            </a:pPr>
+            <a:r>
+              <a:rPr sz="1500">
+                <a:solidFill>
+                  <a:srgbClr val="22282E"/>
+                </a:solidFill>
+              </a:rPr>
+              <a:t>•  "Doble ROT13 = más seguro" — ROT13 es su propia inversa; doble no cifra nada</a:t>
+            </a:r>
+          </a:p>
+          <a:p>
+            <a:pPr>
+              <a:spcAft>
+                <a:spcPts val="600"/>
+              </a:spcAft>
+            </a:pPr>
+            <a:r>
+              <a:rPr sz="1500">
+                <a:solidFill>
+                  <a:srgbClr val="22282E"/>
+                </a:solidFill>
+              </a:rPr>
+              <a:t>•  Reusar clave de Vigenère en muchos mensajes — Facilita Kasiski y correlación entre textos</a:t>
+            </a:r>
+          </a:p>
+        </p:txBody>
+      </p:sp>
+    </p:spTree>
+  </p:cSld>
+  <p:clrMapOvr>
+    <a:masterClrMapping/>
+  </p:clrMapOvr>
+</p:sld>
+</file>
+
+<file path=ppt/slides/slide13.xml><?xml version="1.0" encoding="utf-8"?>
+<p:sld xmlns:a="http://schemas.openxmlformats.org/drawingml/2006/main" xmlns:p="http://schemas.openxmlformats.org/presentationml/2006/main" xmlns:r="http://schemas.openxmlformats.org/officeDocument/2006/relationships">
+  <p:cSld>
+    <p:spTree>
+      <p:nvGrpSpPr>
+        <p:cNvPr id="1" name=""/>
+        <p:cNvGrpSpPr/>
+        <p:nvPr/>
+      </p:nvGrpSpPr>
+      <p:grpSpPr/>
+      <p:sp>
+        <p:nvSpPr>
+          <p:cNvPr id="2" name="TextBox 1"/>
+          <p:cNvSpPr txBox="1"/>
+          <p:nvPr/>
+        </p:nvSpPr>
+        <p:spPr>
+          <a:xfrm>
+            <a:off x="457200" y="320040"/>
+            <a:ext cx="8229600" cy="822960"/>
+          </a:xfrm>
+          <a:prstGeom prst="rect">
+            <a:avLst/>
+          </a:prstGeom>
+          <a:noFill/>
+        </p:spPr>
+        <p:txBody>
+          <a:bodyPr wrap="square">
+            <a:spAutoFit/>
+          </a:bodyPr>
+          <a:lstStyle/>
+          <a:p>
+            <a:r>
+              <a:rPr sz="2600" b="1">
+                <a:solidFill>
+                  <a:srgbClr val="0B3D2E"/>
+                </a:solidFill>
+              </a:rPr>
+              <a:t>❓ Preguntas frecuentes</a:t>
+            </a:r>
+          </a:p>
+        </p:txBody>
+      </p:sp>
+      <p:sp>
+        <p:nvSpPr>
+          <p:cNvPr id="3" name="TextBox 2"/>
+          <p:cNvSpPr txBox="1"/>
+          <p:nvPr/>
+        </p:nvSpPr>
+        <p:spPr>
+          <a:xfrm>
+            <a:off x="457200" y="1280160"/>
+            <a:ext cx="8229600" cy="4937760"/>
+          </a:xfrm>
+          <a:prstGeom prst="rect">
+            <a:avLst/>
+          </a:prstGeom>
+          <a:noFill/>
+        </p:spPr>
+        <p:txBody>
+          <a:bodyPr wrap="square">
+            <a:spAutoFit/>
+          </a:bodyPr>
+          <a:lstStyle/>
+          <a:p>
+            <a:pPr>
+              <a:spcAft>
+                <a:spcPts val="600"/>
+              </a:spcAft>
+            </a:pPr>
+            <a:r>
+              <a:rPr sz="1500">
+                <a:solidFill>
+                  <a:srgbClr val="22282E"/>
+                </a:solidFill>
+              </a:rPr>
+              <a:t>•  ❓ ¿Sigue siendo útil estudiar cifrados clásicos?</a:t>
+            </a:r>
+          </a:p>
+          <a:p>
+            <a:pPr>
+              <a:spcAft>
+                <a:spcPts val="600"/>
+              </a:spcAft>
+            </a:pPr>
+            <a:r>
+              <a:rPr sz="1500">
+                <a:solidFill>
+                  <a:srgbClr val="22282E"/>
+                </a:solidFill>
+              </a:rPr>
+              <a:t>•  Sí: enseñan intuición sobre patrones, frecuencias y por qué las primitivas modernas están diseñadas para eliminar esas estructuras.</a:t>
+            </a:r>
+          </a:p>
+          <a:p>
+            <a:pPr>
+              <a:spcAft>
+                <a:spcPts val="600"/>
+              </a:spcAft>
+            </a:pPr>
+            <a:r>
+              <a:rPr sz="1500">
+                <a:solidFill>
+                  <a:srgbClr val="22282E"/>
+                </a:solidFill>
+              </a:rPr>
+              <a:t>•  ❓ ¿Qué significa que un cifrado sea "seguro"?</a:t>
+            </a:r>
+          </a:p>
+          <a:p>
+            <a:pPr>
+              <a:spcAft>
+                <a:spcPts val="600"/>
+              </a:spcAft>
+            </a:pPr>
+            <a:r>
+              <a:rPr sz="1500">
+                <a:solidFill>
+                  <a:srgbClr val="22282E"/>
+                </a:solidFill>
+              </a:rPr>
+              <a:t>•  Que ningún atacante dentro del modelo de amenaza definido puede romperlo con recursos razonables. La seguridad siempre es relativa a un adversario concreto.</a:t>
+            </a:r>
+          </a:p>
+          <a:p>
+            <a:pPr>
+              <a:spcAft>
+                <a:spcPts val="600"/>
+              </a:spcAft>
+            </a:pPr>
+            <a:r>
+              <a:rPr sz="1500">
+                <a:solidFill>
+                  <a:srgbClr val="22282E"/>
+                </a:solidFill>
+              </a:rPr>
+              <a:t>•  ❓ ¿Por qué "no hagas tu propia cripto"?</a:t>
+            </a:r>
+          </a:p>
+          <a:p>
+            <a:pPr>
+              <a:spcAft>
+                <a:spcPts val="600"/>
+              </a:spcAft>
+            </a:pPr>
+            <a:r>
+              <a:rPr sz="1500">
+                <a:solidFill>
+                  <a:srgbClr val="22282E"/>
+                </a:solidFill>
+              </a:rPr>
+              <a:t>•  Porque los errores sutiles (nonces, padding, timing) rompen esquemas que parecen correctos; usa librerías auditadas.</a:t>
+            </a:r>
+          </a:p>
+        </p:txBody>
+      </p:sp>
+    </p:spTree>
+  </p:cSld>
+  <p:clrMapOvr>
+    <a:masterClrMapping/>
+  </p:clrMapOvr>
+</p:sld>
+</file>
+
+<file path=ppt/slides/slide14.xml><?xml version="1.0" encoding="utf-8"?>
+<p:sld xmlns:a="http://schemas.openxmlformats.org/drawingml/2006/main" xmlns:p="http://schemas.openxmlformats.org/presentationml/2006/main" xmlns:r="http://schemas.openxmlformats.org/officeDocument/2006/relationships">
+  <p:cSld>
+    <p:spTree>
+      <p:nvGrpSpPr>
+        <p:cNvPr id="1" name=""/>
+        <p:cNvGrpSpPr/>
+        <p:nvPr/>
+      </p:nvGrpSpPr>
+      <p:grpSpPr/>
+      <p:sp>
+        <p:nvSpPr>
+          <p:cNvPr id="2" name="TextBox 1"/>
+          <p:cNvSpPr txBox="1"/>
+          <p:nvPr/>
+        </p:nvSpPr>
+        <p:spPr>
+          <a:xfrm>
+            <a:off x="457200" y="320040"/>
+            <a:ext cx="8229600" cy="822960"/>
+          </a:xfrm>
+          <a:prstGeom prst="rect">
+            <a:avLst/>
+          </a:prstGeom>
+          <a:noFill/>
+        </p:spPr>
+        <p:txBody>
+          <a:bodyPr wrap="square">
+            <a:spAutoFit/>
+          </a:bodyPr>
+          <a:lstStyle/>
+          <a:p>
+            <a:r>
+              <a:rPr sz="2600" b="1">
+                <a:solidFill>
+                  <a:srgbClr val="0B3D2E"/>
+                </a:solidFill>
+              </a:rPr>
+              <a:t>🔗 Referencias</a:t>
+            </a:r>
+          </a:p>
+        </p:txBody>
+      </p:sp>
+      <p:sp>
+        <p:nvSpPr>
+          <p:cNvPr id="3" name="TextBox 2"/>
+          <p:cNvSpPr txBox="1"/>
+          <p:nvPr/>
+        </p:nvSpPr>
+        <p:spPr>
+          <a:xfrm>
+            <a:off x="457200" y="1280160"/>
+            <a:ext cx="8229600" cy="4937760"/>
+          </a:xfrm>
+          <a:prstGeom prst="rect">
+            <a:avLst/>
+          </a:prstGeom>
+          <a:noFill/>
+        </p:spPr>
+        <p:txBody>
+          <a:bodyPr wrap="square">
+            <a:spAutoFit/>
+          </a:bodyPr>
+          <a:lstStyle/>
+          <a:p>
+            <a:pPr>
+              <a:spcAft>
+                <a:spcPts val="600"/>
+              </a:spcAft>
+            </a:pPr>
+            <a:r>
+              <a:rPr sz="1500">
+                <a:solidFill>
+                  <a:srgbClr val="22282E"/>
+                </a:solidFill>
+              </a:rPr>
               <a:t>•  Aumasson, Serious Cryptography, cap. 1 — &lt;https://nostarch.com/serious-cryptography-2nd-edition&gt;</a:t>
             </a:r>
           </a:p>
@@ -3599,6 +3855,81 @@
           </a:p>
         </p:txBody>
       </p:sp>
+    </p:spTree>
+  </p:cSld>
+  <p:clrMapOvr>
+    <a:masterClrMapping/>
+  </p:clrMapOvr>
+</p:sld>
+</file>
+
+<file path=ppt/slides/slide15.xml><?xml version="1.0" encoding="utf-8"?>
+<p:sld xmlns:a="http://schemas.openxmlformats.org/drawingml/2006/main" xmlns:p="http://schemas.openxmlformats.org/presentationml/2006/main" xmlns:r="http://schemas.openxmlformats.org/officeDocument/2006/relationships">
+  <p:cSld>
+    <p:spTree>
+      <p:nvGrpSpPr>
+        <p:cNvPr id="1" name=""/>
+        <p:cNvGrpSpPr/>
+        <p:nvPr/>
+      </p:nvGrpSpPr>
+      <p:grpSpPr/>
+      <p:sp>
+        <p:nvSpPr>
+          <p:cNvPr id="2" name="TextBox 1"/>
+          <p:cNvSpPr txBox="1"/>
+          <p:nvPr/>
+        </p:nvSpPr>
+        <p:spPr>
+          <a:xfrm>
+            <a:off x="457200" y="274320"/>
+            <a:ext cx="8229600" cy="640080"/>
+          </a:xfrm>
+          <a:prstGeom prst="rect">
+            <a:avLst/>
+          </a:prstGeom>
+          <a:noFill/>
+        </p:spPr>
+        <p:txBody>
+          <a:bodyPr wrap="square">
+            <a:spAutoFit/>
+          </a:bodyPr>
+          <a:lstStyle/>
+          <a:p>
+            <a:r>
+              <a:rPr sz="2200" b="1">
+                <a:solidFill>
+                  <a:srgbClr val="0B3D2E"/>
+                </a:solidFill>
+              </a:rPr>
+              <a:t>Diagrama de la clase</a:t>
+            </a:r>
+          </a:p>
+        </p:txBody>
+      </p:sp>
+      <p:pic>
+        <p:nvPicPr>
+          <p:cNvPr id="3" name="Picture 2" descr="2b06938b4c7af8e0.png"/>
+          <p:cNvPicPr>
+            <a:picLocks noChangeAspect="1"/>
+          </p:cNvPicPr>
+          <p:nvPr/>
+        </p:nvPicPr>
+        <p:blipFill>
+          <a:blip r:embed="rId2"/>
+          <a:stretch>
+            <a:fillRect/>
+          </a:stretch>
+        </p:blipFill>
+        <p:spPr>
+          <a:xfrm>
+            <a:off x="457200" y="1824228"/>
+            <a:ext cx="8229600" cy="3849624"/>
+          </a:xfrm>
+          <a:prstGeom prst="rect">
+            <a:avLst/>
+          </a:prstGeom>
+        </p:spPr>
+      </p:pic>
     </p:spTree>
   </p:cSld>
   <p:clrMapOvr>
@@ -3683,7 +4014,7 @@
                   <a:srgbClr val="22282E"/>
                 </a:solidFill>
               </a:rPr>
-              <a:t>•  Comprender qué problemas resuelve la criptografía, cómo evolucionó de los cifrados clásicos (sustitución, transposición, Vigenère, Enigma) a la criptografía moderna, y asimilar los principios que rigen todo el resto de la parte: el principio de Kerckhoffs, el modelo de amenaza, la diferencia entre confidencialidad, integridad y autenticidad, y por qué "no inventes tu propia cripto".</a:t>
+              <a:t>•  Comprender qué problemas resuelve la criptografía, cómo evolucionó de los cifrados clásicos (sustitución, transposición, Vigenère, Enigma) a la criptografía moderna, y asimilar los principios que…</a:t>
             </a:r>
           </a:p>
         </p:txBody>
@@ -4077,7 +4408,7 @@
                   <a:srgbClr val="0B3D2E"/>
                 </a:solidFill>
               </a:rPr>
-              <a:t>📖 Definiciones y características</a:t>
+              <a:t>🧠 Explicación en profundidad</a:t>
             </a:r>
           </a:p>
         </p:txBody>
@@ -4115,97 +4446,97 @@
                   <a:srgbClr val="22282E"/>
                 </a:solidFill>
               </a:rPr>
-              <a:t>•  Confidencialidad: garantía de que solo las partes autorizadas leen el mensaje. Se logra con cifrado. Característica clave: no impide por sí sola la manipulación.</a:t>
-            </a:r>
-          </a:p>
-          <a:p>
-            <a:pPr>
-              <a:spcAft>
-                <a:spcPts val="600"/>
-              </a:spcAft>
-            </a:pPr>
-            <a:r>
-              <a:rPr sz="1500">
-                <a:solidFill>
-                  <a:srgbClr val="22282E"/>
-                </a:solidFill>
-              </a:rPr>
-              <a:t>•  Integridad: garantía de que el mensaje no fue alterado. Se logra con hashes y MAC. Característica: detecta cambios, no los previene.</a:t>
-            </a:r>
-          </a:p>
-          <a:p>
-            <a:pPr>
-              <a:spcAft>
-                <a:spcPts val="600"/>
-              </a:spcAft>
-            </a:pPr>
-            <a:r>
-              <a:rPr sz="1500">
-                <a:solidFill>
-                  <a:srgbClr val="22282E"/>
-                </a:solidFill>
-              </a:rPr>
-              <a:t>•  Autenticación: garantía del origen del mensaje o la identidad de una parte. Se logra con MAC y firmas.</a:t>
-            </a:r>
-          </a:p>
-          <a:p>
-            <a:pPr>
-              <a:spcAft>
-                <a:spcPts val="600"/>
-              </a:spcAft>
-            </a:pPr>
-            <a:r>
-              <a:rPr sz="1500">
-                <a:solidFill>
-                  <a:srgbClr val="22282E"/>
-                </a:solidFill>
-              </a:rPr>
-              <a:t>•  Principio de Kerckhoffs: un sistema debe ser seguro aunque todo sobre él, excepto la clave, sea público. Contrasta con "seguridad por oscuridad".</a:t>
-            </a:r>
-          </a:p>
-          <a:p>
-            <a:pPr>
-              <a:spcAft>
-                <a:spcPts val="600"/>
-              </a:spcAft>
-            </a:pPr>
-            <a:r>
-              <a:rPr sz="1500">
-                <a:solidFill>
-                  <a:srgbClr val="22282E"/>
-                </a:solidFill>
-              </a:rPr>
-              <a:t>•  Modelo de amenaza: descripción explícita de qué capacidades tiene el atacante (¿ve el texto cifrado? ¿elige textos? ¿tiene tiempo cuántico?).</a:t>
-            </a:r>
-          </a:p>
-          <a:p>
-            <a:pPr>
-              <a:spcAft>
-                <a:spcPts val="600"/>
-              </a:spcAft>
-            </a:pPr>
-            <a:r>
-              <a:rPr sz="1500">
-                <a:solidFill>
-                  <a:srgbClr val="22282E"/>
-                </a:solidFill>
-              </a:rPr>
-              <a:t>•  Espacio de claves: número total de claves posibles. Determina la resistencia a fuerza bruta (128 bits ≈ 3.4×10³⁸).</a:t>
-            </a:r>
-          </a:p>
-          <a:p>
-            <a:pPr>
-              <a:spcAft>
-                <a:spcPts val="600"/>
-              </a:spcAft>
-            </a:pPr>
-            <a:r>
-              <a:rPr sz="1500">
-                <a:solidFill>
-                  <a:srgbClr val="22282E"/>
-                </a:solidFill>
-              </a:rPr>
-              <a:t>•  Texto plano / texto cifrado: entrada legible y salida cifrada de un algoritmo.</a:t>
+              <a:t>•  Casi toda la criptografía anterior al siglo XX se construye con dos operaciones.</a:t>
+            </a:r>
+          </a:p>
+          <a:p>
+            <a:pPr>
+              <a:spcAft>
+                <a:spcPts val="600"/>
+              </a:spcAft>
+            </a:pPr>
+            <a:r>
+              <a:rPr sz="1500">
+                <a:solidFill>
+                  <a:srgbClr val="22282E"/>
+                </a:solidFill>
+              </a:rPr>
+              <a:t>•  La sustitución reemplaza cada símbolo por otro (el cifrado del César desplaza tres</a:t>
+            </a:r>
+          </a:p>
+          <a:p>
+            <a:pPr>
+              <a:spcAft>
+                <a:spcPts val="600"/>
+              </a:spcAft>
+            </a:pPr>
+            <a:r>
+              <a:rPr sz="1500">
+                <a:solidFill>
+                  <a:srgbClr val="22282E"/>
+                </a:solidFill>
+              </a:rPr>
+              <a:t>•  posiciones); la transposición mantiene los símbolos pero cambia su orden. Ninguna de</a:t>
+            </a:r>
+          </a:p>
+          <a:p>
+            <a:pPr>
+              <a:spcAft>
+                <a:spcPts val="600"/>
+              </a:spcAft>
+            </a:pPr>
+            <a:r>
+              <a:rPr sz="1500">
+                <a:solidFill>
+                  <a:srgbClr val="22282E"/>
+                </a:solidFill>
+              </a:rPr>
+              <a:t>•  las dos destruye la estructura estadística del idioma, y ahí está su ruina: en español</a:t>
+            </a:r>
+          </a:p>
+          <a:p>
+            <a:pPr>
+              <a:spcAft>
+                <a:spcPts val="600"/>
+              </a:spcAft>
+            </a:pPr>
+            <a:r>
+              <a:rPr sz="1500">
+                <a:solidFill>
+                  <a:srgbClr val="22282E"/>
+                </a:solidFill>
+              </a:rPr>
+              <a:t>•  la e y la a aparecen mucho más que la x, y una sustitución simple traslada esa</a:t>
+            </a:r>
+          </a:p>
+          <a:p>
+            <a:pPr>
+              <a:spcAft>
+                <a:spcPts val="600"/>
+              </a:spcAft>
+            </a:pPr>
+            <a:r>
+              <a:rPr sz="1500">
+                <a:solidFill>
+                  <a:srgbClr val="22282E"/>
+                </a:solidFill>
+              </a:rPr>
+              <a:t>•  desigualdad al texto cifrado intacta. El análisis de frecuencias, descrito por</a:t>
+            </a:r>
+          </a:p>
+          <a:p>
+            <a:pPr>
+              <a:spcAft>
+                <a:spcPts val="600"/>
+              </a:spcAft>
+            </a:pPr>
+            <a:r>
+              <a:rPr sz="1500">
+                <a:solidFill>
+                  <a:srgbClr val="22282E"/>
+                </a:solidFill>
+              </a:rPr>
+              <a:t>•  al-Kindi en el siglo IX, rompe cualquier sustitución monoalfabética con lápiz y papel.</a:t>
             </a:r>
           </a:p>
         </p:txBody>
@@ -4256,7 +4587,7 @@
                   <a:srgbClr val="0B3D2E"/>
                 </a:solidFill>
               </a:rPr>
-              <a:t>🧰 Herramientas y preparación</a:t>
+              <a:t>📖 Definiciones y características</a:t>
             </a:r>
           </a:p>
         </p:txBody>
@@ -4294,67 +4625,97 @@
                   <a:srgbClr val="22282E"/>
                 </a:solidFill>
               </a:rPr>
-              <a:t>•  Trabajaremos en un entorno de laboratorio aislado (máquina virtual o contenedor propio). Herramientas:</a:t>
-            </a:r>
-          </a:p>
-          <a:p>
-            <a:pPr>
-              <a:spcAft>
-                <a:spcPts val="600"/>
-              </a:spcAft>
-            </a:pPr>
-            <a:r>
-              <a:rPr sz="1500">
-                <a:solidFill>
-                  <a:srgbClr val="22282E"/>
-                </a:solidFill>
-              </a:rPr>
-              <a:t>•  python3 --version</a:t>
-            </a:r>
-          </a:p>
-          <a:p>
-            <a:pPr>
-              <a:spcAft>
-                <a:spcPts val="600"/>
-              </a:spcAft>
-            </a:pPr>
-            <a:r>
-              <a:rPr sz="1500">
-                <a:solidFill>
-                  <a:srgbClr val="22282E"/>
-                </a:solidFill>
-              </a:rPr>
-              <a:t>•  pip install pycipher</a:t>
-            </a:r>
-          </a:p>
-          <a:p>
-            <a:pPr>
-              <a:spcAft>
-                <a:spcPts val="600"/>
-              </a:spcAft>
-            </a:pPr>
-            <a:r>
-              <a:rPr sz="1500">
-                <a:solidFill>
-                  <a:srgbClr val="22282E"/>
-                </a:solidFill>
-              </a:rPr>
-              <a:t>•  openssl version</a:t>
-            </a:r>
-          </a:p>
-          <a:p>
-            <a:pPr>
-              <a:spcAft>
-                <a:spcPts val="600"/>
-              </a:spcAft>
-            </a:pPr>
-            <a:r>
-              <a:rPr sz="1500">
-                <a:solidFill>
-                  <a:srgbClr val="22282E"/>
-                </a:solidFill>
-              </a:rPr>
-              <a:t>•  No se requiere red externa. Todos los ejercicios son locales.</a:t>
+              <a:t>•  Confidencialidad: garantía de que solo las partes autorizadas leen el mensaje. Se logra con cifrado. Característica clave: no impide por sí sola la manipulación.</a:t>
+            </a:r>
+          </a:p>
+          <a:p>
+            <a:pPr>
+              <a:spcAft>
+                <a:spcPts val="600"/>
+              </a:spcAft>
+            </a:pPr>
+            <a:r>
+              <a:rPr sz="1500">
+                <a:solidFill>
+                  <a:srgbClr val="22282E"/>
+                </a:solidFill>
+              </a:rPr>
+              <a:t>•  Integridad: garantía de que el mensaje no fue alterado. Se logra con hashes y MAC. Característica: detecta cambios, no los previene.</a:t>
+            </a:r>
+          </a:p>
+          <a:p>
+            <a:pPr>
+              <a:spcAft>
+                <a:spcPts val="600"/>
+              </a:spcAft>
+            </a:pPr>
+            <a:r>
+              <a:rPr sz="1500">
+                <a:solidFill>
+                  <a:srgbClr val="22282E"/>
+                </a:solidFill>
+              </a:rPr>
+              <a:t>•  Autenticación: garantía del origen del mensaje o la identidad de una parte. Se logra con MAC y firmas.</a:t>
+            </a:r>
+          </a:p>
+          <a:p>
+            <a:pPr>
+              <a:spcAft>
+                <a:spcPts val="600"/>
+              </a:spcAft>
+            </a:pPr>
+            <a:r>
+              <a:rPr sz="1500">
+                <a:solidFill>
+                  <a:srgbClr val="22282E"/>
+                </a:solidFill>
+              </a:rPr>
+              <a:t>•  Principio de Kerckhoffs: un sistema debe ser seguro aunque todo sobre él, excepto la clave, sea público. Contrasta con "seguridad por oscuridad".</a:t>
+            </a:r>
+          </a:p>
+          <a:p>
+            <a:pPr>
+              <a:spcAft>
+                <a:spcPts val="600"/>
+              </a:spcAft>
+            </a:pPr>
+            <a:r>
+              <a:rPr sz="1500">
+                <a:solidFill>
+                  <a:srgbClr val="22282E"/>
+                </a:solidFill>
+              </a:rPr>
+              <a:t>•  Modelo de amenaza: descripción explícita de qué capacidades tiene el atacante (¿ve el texto cifrado? ¿elige textos? ¿tiene tiempo cuántico?).</a:t>
+            </a:r>
+          </a:p>
+          <a:p>
+            <a:pPr>
+              <a:spcAft>
+                <a:spcPts val="600"/>
+              </a:spcAft>
+            </a:pPr>
+            <a:r>
+              <a:rPr sz="1500">
+                <a:solidFill>
+                  <a:srgbClr val="22282E"/>
+                </a:solidFill>
+              </a:rPr>
+              <a:t>•  Espacio de claves: número total de claves posibles. Determina la resistencia a fuerza bruta (128 bits ≈ 3.4×10³⁸).</a:t>
+            </a:r>
+          </a:p>
+          <a:p>
+            <a:pPr>
+              <a:spcAft>
+                <a:spcPts val="600"/>
+              </a:spcAft>
+            </a:pPr>
+            <a:r>
+              <a:rPr sz="1500">
+                <a:solidFill>
+                  <a:srgbClr val="22282E"/>
+                </a:solidFill>
+              </a:rPr>
+              <a:t>•  Texto plano / texto cifrado: entrada legible y salida cifrada de un algoritmo.</a:t>
             </a:r>
           </a:p>
         </p:txBody>
@@ -4405,7 +4766,7 @@
                   <a:srgbClr val="0B3D2E"/>
                 </a:solidFill>
               </a:rPr>
-              <a:t>🧪 Laboratorio guiado</a:t>
+              <a:t>📔 Glosario</a:t>
             </a:r>
           </a:p>
         </p:txBody>
@@ -4443,97 +4804,97 @@
                   <a:srgbClr val="22282E"/>
                 </a:solidFill>
               </a:rPr>
-              <a:t>•  Cifrado César en Python. Implementa un desplazamiento y verifica que el espacio de claves (25) es trivial de romper:</a:t>
-            </a:r>
-          </a:p>
-          <a:p>
-            <a:pPr>
-              <a:spcAft>
-                <a:spcPts val="600"/>
-              </a:spcAft>
-            </a:pPr>
-            <a:r>
-              <a:rPr sz="1500">
-                <a:solidFill>
-                  <a:srgbClr val="22282E"/>
-                </a:solidFill>
-              </a:rPr>
-              <a:t>•  def cesar(texto, k):</a:t>
-            </a:r>
-          </a:p>
-          <a:p>
-            <a:pPr>
-              <a:spcAft>
-                <a:spcPts val="600"/>
-              </a:spcAft>
-            </a:pPr>
-            <a:r>
-              <a:rPr sz="1500">
-                <a:solidFill>
-                  <a:srgbClr val="22282E"/>
-                </a:solidFill>
-              </a:rPr>
-              <a:t>•  return ''.join(</a:t>
-            </a:r>
-          </a:p>
-          <a:p>
-            <a:pPr>
-              <a:spcAft>
-                <a:spcPts val="600"/>
-              </a:spcAft>
-            </a:pPr>
-            <a:r>
-              <a:rPr sz="1500">
-                <a:solidFill>
-                  <a:srgbClr val="22282E"/>
-                </a:solidFill>
-              </a:rPr>
-              <a:t>•  chr((ord(c) - 65 + k) % 26 + 65) if c.isalpha() else c</a:t>
-            </a:r>
-          </a:p>
-          <a:p>
-            <a:pPr>
-              <a:spcAft>
-                <a:spcPts val="600"/>
-              </a:spcAft>
-            </a:pPr>
-            <a:r>
-              <a:rPr sz="1500">
-                <a:solidFill>
-                  <a:srgbClr val="22282E"/>
-                </a:solidFill>
-              </a:rPr>
-              <a:t>•  for c in texto.upper()</a:t>
-            </a:r>
-          </a:p>
-          <a:p>
-            <a:pPr>
-              <a:spcAft>
-                <a:spcPts val="600"/>
-              </a:spcAft>
-            </a:pPr>
-            <a:r>
-              <a:rPr sz="1500">
-                <a:solidFill>
-                  <a:srgbClr val="22282E"/>
-                </a:solidFill>
-              </a:rPr>
-              <a:t>•  print(cesar("ATAQUE AL AMANECER", 3))</a:t>
-            </a:r>
-          </a:p>
-          <a:p>
-            <a:pPr>
-              <a:spcAft>
-                <a:spcPts val="600"/>
-              </a:spcAft>
-            </a:pPr>
-            <a:r>
-              <a:rPr sz="1500">
-                <a:solidFill>
-                  <a:srgbClr val="22282E"/>
-                </a:solidFill>
-              </a:rPr>
-              <a:t>•  Fuerza bruta. Recorre las 26 claves e imprime todas las salidas; observa que un humano identifica la correcta al instante.</a:t>
+              <a:t>•  Término — Definición concisa</a:t>
+            </a:r>
+          </a:p>
+          <a:p>
+            <a:pPr>
+              <a:spcAft>
+                <a:spcPts val="600"/>
+              </a:spcAft>
+            </a:pPr>
+            <a:r>
+              <a:rPr sz="1500">
+                <a:solidFill>
+                  <a:srgbClr val="22282E"/>
+                </a:solidFill>
+              </a:rPr>
+              <a:t>•  Texto claro / texto cifrado — Mensaje legible / resultado de cifrarlo</a:t>
+            </a:r>
+          </a:p>
+          <a:p>
+            <a:pPr>
+              <a:spcAft>
+                <a:spcPts val="600"/>
+              </a:spcAft>
+            </a:pPr>
+            <a:r>
+              <a:rPr sz="1500">
+                <a:solidFill>
+                  <a:srgbClr val="22282E"/>
+                </a:solidFill>
+              </a:rPr>
+              <a:t>•  Sustitución — Reemplazar cada símbolo por otro</a:t>
+            </a:r>
+          </a:p>
+          <a:p>
+            <a:pPr>
+              <a:spcAft>
+                <a:spcPts val="600"/>
+              </a:spcAft>
+            </a:pPr>
+            <a:r>
+              <a:rPr sz="1500">
+                <a:solidFill>
+                  <a:srgbClr val="22282E"/>
+                </a:solidFill>
+              </a:rPr>
+              <a:t>•  Transposición — Reordenar los símbolos sin cambiarlos</a:t>
+            </a:r>
+          </a:p>
+          <a:p>
+            <a:pPr>
+              <a:spcAft>
+                <a:spcPts val="600"/>
+              </a:spcAft>
+            </a:pPr>
+            <a:r>
+              <a:rPr sz="1500">
+                <a:solidFill>
+                  <a:srgbClr val="22282E"/>
+                </a:solidFill>
+              </a:rPr>
+              <a:t>•  Cifrado de César — Sustitución por desplazamiento fijo del alfabeto</a:t>
+            </a:r>
+          </a:p>
+          <a:p>
+            <a:pPr>
+              <a:spcAft>
+                <a:spcPts val="600"/>
+              </a:spcAft>
+            </a:pPr>
+            <a:r>
+              <a:rPr sz="1500">
+                <a:solidFill>
+                  <a:srgbClr val="22282E"/>
+                </a:solidFill>
+              </a:rPr>
+              <a:t>•  Análisis de frecuencias — Romper una sustitución explotando la estadística del idioma</a:t>
+            </a:r>
+          </a:p>
+          <a:p>
+            <a:pPr>
+              <a:spcAft>
+                <a:spcPts val="600"/>
+              </a:spcAft>
+            </a:pPr>
+            <a:r>
+              <a:rPr sz="1500">
+                <a:solidFill>
+                  <a:srgbClr val="22282E"/>
+                </a:solidFill>
+              </a:rPr>
+              <a:t>•  Vigenère — Cifrado polialfabético con clave repetida</a:t>
             </a:r>
           </a:p>
         </p:txBody>
@@ -4584,7 +4945,7 @@
                   <a:srgbClr val="0B3D2E"/>
                 </a:solidFill>
               </a:rPr>
-              <a:t>✍️ Ejercicios</a:t>
+              <a:t>🧰 Herramientas y preparación</a:t>
             </a:r>
           </a:p>
         </p:txBody>
@@ -4622,82 +4983,22 @@
                   <a:srgbClr val="22282E"/>
                 </a:solidFill>
               </a:rPr>
-              <a:t>•  Descifra a mano WKLV LV D WHVW sabiendo que es César.</a:t>
-            </a:r>
-          </a:p>
-          <a:p>
-            <a:pPr>
-              <a:spcAft>
-                <a:spcPts val="600"/>
-              </a:spcAft>
-            </a:pPr>
-            <a:r>
-              <a:rPr sz="1500">
-                <a:solidFill>
-                  <a:srgbClr val="22282E"/>
-                </a:solidFill>
-              </a:rPr>
-              <a:t>•  Escribe una función que rompa Vigenère dada la longitud de clave.</a:t>
-            </a:r>
-          </a:p>
-          <a:p>
-            <a:pPr>
-              <a:spcAft>
-                <a:spcPts val="600"/>
-              </a:spcAft>
-            </a:pPr>
-            <a:r>
-              <a:rPr sz="1500">
-                <a:solidFill>
-                  <a:srgbClr val="22282E"/>
-                </a:solidFill>
-              </a:rPr>
-              <a:t>•  Redacta un modelo de amenaza para una app de chat: define atacante, capacidades y activos.</a:t>
-            </a:r>
-          </a:p>
-          <a:p>
-            <a:pPr>
-              <a:spcAft>
-                <a:spcPts val="600"/>
-              </a:spcAft>
-            </a:pPr>
-            <a:r>
-              <a:rPr sz="1500">
-                <a:solidFill>
-                  <a:srgbClr val="22282E"/>
-                </a:solidFill>
-              </a:rPr>
-              <a:t>•  Explica con un ejemplo por qué la "seguridad por oscuridad" falló en un caso real (p. ej. cifrados propietarios rotos).</a:t>
-            </a:r>
-          </a:p>
-          <a:p>
-            <a:pPr>
-              <a:spcAft>
-                <a:spcPts val="600"/>
-              </a:spcAft>
-            </a:pPr>
-            <a:r>
-              <a:rPr sz="1500">
-                <a:solidFill>
-                  <a:srgbClr val="22282E"/>
-                </a:solidFill>
-              </a:rPr>
-              <a:t>•  Compara el espacio de claves de César, DES (56 bits) y AES-128; expresa cuántas veces mayor es cada uno.</a:t>
-            </a:r>
-          </a:p>
-          <a:p>
-            <a:pPr>
-              <a:spcAft>
-                <a:spcPts val="600"/>
-              </a:spcAft>
-            </a:pPr>
-            <a:r>
-              <a:rPr sz="1500">
-                <a:solidFill>
-                  <a:srgbClr val="22282E"/>
-                </a:solidFill>
-              </a:rPr>
-              <a:t>•  Diseña un cifrado de transposición columnar y descíbelo con criptoanálisis.</a:t>
+              <a:t>•  Trabajaremos en un entorno de laboratorio aislado (máquina virtual o contenedor propio). Herramientas:</a:t>
+            </a:r>
+          </a:p>
+          <a:p>
+            <a:pPr>
+              <a:spcAft>
+                <a:spcPts val="600"/>
+              </a:spcAft>
+            </a:pPr>
+            <a:r>
+              <a:rPr sz="1500">
+                <a:solidFill>
+                  <a:srgbClr val="22282E"/>
+                </a:solidFill>
+              </a:rPr>
+              <a:t>•  No se requiere red externa. Todos los ejercicios son locales.</a:t>
             </a:r>
           </a:p>
         </p:txBody>
@@ -4748,7 +5049,7 @@
                   <a:srgbClr val="0B3D2E"/>
                 </a:solidFill>
               </a:rPr>
-              <a:t>📝 Reto verificable</a:t>
+              <a:t>🧪 Laboratorio guiado</a:t>
             </a:r>
           </a:p>
         </p:txBody>
@@ -4786,7 +5087,67 @@
                   <a:srgbClr val="22282E"/>
                 </a:solidFill>
               </a:rPr>
-              <a:t>•  Implementa un rompedor automático de cifrado por sustitución monoalfabética usando análisis de frecuencias y bigramas. Criterio de aceptación: dado un texto cifrado en español de al menos 500 caracteres, tu programa recupera al menos el 90 % del texto plano sin conocer la clave, mostrando el mapeo deducido.</a:t>
+              <a:t>•  Cifrado César en Python. Implementa un desplazamiento y verifica que el espacio de claves (25) es trivial de romper:</a:t>
+            </a:r>
+          </a:p>
+          <a:p>
+            <a:pPr>
+              <a:spcAft>
+                <a:spcPts val="600"/>
+              </a:spcAft>
+            </a:pPr>
+            <a:r>
+              <a:rPr sz="1500">
+                <a:solidFill>
+                  <a:srgbClr val="22282E"/>
+                </a:solidFill>
+              </a:rPr>
+              <a:t>•  Fuerza bruta. Recorre las 26 claves e imprime todas las salidas; observa que un humano identifica la correcta al instante.</a:t>
+            </a:r>
+          </a:p>
+          <a:p>
+            <a:pPr>
+              <a:spcAft>
+                <a:spcPts val="600"/>
+              </a:spcAft>
+            </a:pPr>
+            <a:r>
+              <a:rPr sz="1500">
+                <a:solidFill>
+                  <a:srgbClr val="22282E"/>
+                </a:solidFill>
+              </a:rPr>
+              <a:t>•  Análisis de frecuencias. Cuenta la frecuencia de cada letra en un texto cifrado por sustitución y compárala con la distribución del español (la E y la A dominan). Deduce el mapeo.</a:t>
+            </a:r>
+          </a:p>
+          <a:p>
+            <a:pPr>
+              <a:spcAft>
+                <a:spcPts val="600"/>
+              </a:spcAft>
+            </a:pPr>
+            <a:r>
+              <a:rPr sz="1500">
+                <a:solidFill>
+                  <a:srgbClr val="22282E"/>
+                </a:solidFill>
+              </a:rPr>
+              <a:t>•  Vigenère y Kasiski. Cifra un texto largo con clave SEGURIDAD. Busca repeticiones de trigramas y mide las distancias; el máximo común divisor sugiere la longitud de la clave, rompiendo la ilusión de…</a:t>
+            </a:r>
+          </a:p>
+          <a:p>
+            <a:pPr>
+              <a:spcAft>
+                <a:spcPts val="600"/>
+              </a:spcAft>
+            </a:pPr>
+            <a:r>
+              <a:rPr sz="1500">
+                <a:solidFill>
+                  <a:srgbClr val="22282E"/>
+                </a:solidFill>
+              </a:rPr>
+              <a:t>•  Discusión de Kerckhoffs. Toma un "algoritmo secreto" inventado y argumenta por qué su secreto no puede sostenerse: se filtra, se aplica ingeniería inversa, no se audita.</a:t>
             </a:r>
           </a:p>
         </p:txBody>
